--- a/ゲーム科2年/00_前期/ゲームエンジンⅢ/バージョン管理/01_Git導入.pptx
+++ b/ゲーム科2年/00_前期/ゲームエンジンⅢ/バージョン管理/01_Git導入.pptx
@@ -265,7 +265,7 @@
           <a:p>
             <a:fld id="{E9CC885B-4903-4D54-9A93-00025F12DED9}" type="datetimeFigureOut">
               <a:rPr kumimoji="1" lang="ja-JP" altLang="en-US" smtClean="0"/>
-              <a:t>2025/1/15</a:t>
+              <a:t>2025/2/27</a:t>
             </a:fld>
             <a:endParaRPr kumimoji="1" lang="ja-JP" altLang="en-US"/>
           </a:p>
@@ -495,7 +495,7 @@
           <a:p>
             <a:fld id="{E9CC885B-4903-4D54-9A93-00025F12DED9}" type="datetimeFigureOut">
               <a:rPr kumimoji="1" lang="ja-JP" altLang="en-US" smtClean="0"/>
-              <a:t>2025/1/15</a:t>
+              <a:t>2025/2/27</a:t>
             </a:fld>
             <a:endParaRPr kumimoji="1" lang="ja-JP" altLang="en-US"/>
           </a:p>
@@ -735,7 +735,7 @@
           <a:p>
             <a:fld id="{E9CC885B-4903-4D54-9A93-00025F12DED9}" type="datetimeFigureOut">
               <a:rPr kumimoji="1" lang="ja-JP" altLang="en-US" smtClean="0"/>
-              <a:t>2025/1/15</a:t>
+              <a:t>2025/2/27</a:t>
             </a:fld>
             <a:endParaRPr kumimoji="1" lang="ja-JP" altLang="en-US"/>
           </a:p>
@@ -965,7 +965,7 @@
           <a:p>
             <a:fld id="{E9CC885B-4903-4D54-9A93-00025F12DED9}" type="datetimeFigureOut">
               <a:rPr kumimoji="1" lang="ja-JP" altLang="en-US" smtClean="0"/>
-              <a:t>2025/1/15</a:t>
+              <a:t>2025/2/27</a:t>
             </a:fld>
             <a:endParaRPr kumimoji="1" lang="ja-JP" altLang="en-US"/>
           </a:p>
@@ -1240,7 +1240,7 @@
           <a:p>
             <a:fld id="{E9CC885B-4903-4D54-9A93-00025F12DED9}" type="datetimeFigureOut">
               <a:rPr kumimoji="1" lang="ja-JP" altLang="en-US" smtClean="0"/>
-              <a:t>2025/1/15</a:t>
+              <a:t>2025/2/27</a:t>
             </a:fld>
             <a:endParaRPr kumimoji="1" lang="ja-JP" altLang="en-US"/>
           </a:p>
@@ -1569,7 +1569,7 @@
           <a:p>
             <a:fld id="{E9CC885B-4903-4D54-9A93-00025F12DED9}" type="datetimeFigureOut">
               <a:rPr kumimoji="1" lang="ja-JP" altLang="en-US" smtClean="0"/>
-              <a:t>2025/1/15</a:t>
+              <a:t>2025/2/27</a:t>
             </a:fld>
             <a:endParaRPr kumimoji="1" lang="ja-JP" altLang="en-US"/>
           </a:p>
@@ -2045,7 +2045,7 @@
           <a:p>
             <a:fld id="{E9CC885B-4903-4D54-9A93-00025F12DED9}" type="datetimeFigureOut">
               <a:rPr kumimoji="1" lang="ja-JP" altLang="en-US" smtClean="0"/>
-              <a:t>2025/1/15</a:t>
+              <a:t>2025/2/27</a:t>
             </a:fld>
             <a:endParaRPr kumimoji="1" lang="ja-JP" altLang="en-US"/>
           </a:p>
@@ -2186,7 +2186,7 @@
           <a:p>
             <a:fld id="{E9CC885B-4903-4D54-9A93-00025F12DED9}" type="datetimeFigureOut">
               <a:rPr kumimoji="1" lang="ja-JP" altLang="en-US" smtClean="0"/>
-              <a:t>2025/1/15</a:t>
+              <a:t>2025/2/27</a:t>
             </a:fld>
             <a:endParaRPr kumimoji="1" lang="ja-JP" altLang="en-US"/>
           </a:p>
@@ -2299,7 +2299,7 @@
           <a:p>
             <a:fld id="{E9CC885B-4903-4D54-9A93-00025F12DED9}" type="datetimeFigureOut">
               <a:rPr kumimoji="1" lang="ja-JP" altLang="en-US" smtClean="0"/>
-              <a:t>2025/1/15</a:t>
+              <a:t>2025/2/27</a:t>
             </a:fld>
             <a:endParaRPr kumimoji="1" lang="ja-JP" altLang="en-US"/>
           </a:p>
@@ -2642,7 +2642,7 @@
           <a:p>
             <a:fld id="{E9CC885B-4903-4D54-9A93-00025F12DED9}" type="datetimeFigureOut">
               <a:rPr kumimoji="1" lang="ja-JP" altLang="en-US" smtClean="0"/>
-              <a:t>2025/1/15</a:t>
+              <a:t>2025/2/27</a:t>
             </a:fld>
             <a:endParaRPr kumimoji="1" lang="ja-JP" altLang="en-US"/>
           </a:p>
@@ -2930,7 +2930,7 @@
           <a:p>
             <a:fld id="{E9CC885B-4903-4D54-9A93-00025F12DED9}" type="datetimeFigureOut">
               <a:rPr kumimoji="1" lang="ja-JP" altLang="en-US" smtClean="0"/>
-              <a:t>2025/1/15</a:t>
+              <a:t>2025/2/27</a:t>
             </a:fld>
             <a:endParaRPr kumimoji="1" lang="ja-JP" altLang="en-US"/>
           </a:p>
@@ -3203,7 +3203,7 @@
           <a:p>
             <a:fld id="{E9CC885B-4903-4D54-9A93-00025F12DED9}" type="datetimeFigureOut">
               <a:rPr kumimoji="1" lang="ja-JP" altLang="en-US" smtClean="0"/>
-              <a:t>2025/1/15</a:t>
+              <a:t>2025/2/27</a:t>
             </a:fld>
             <a:endParaRPr kumimoji="1" lang="ja-JP" altLang="en-US"/>
           </a:p>
@@ -3674,7 +3674,7 @@
         <p:spPr>
           <a:xfrm>
             <a:off x="567542" y="1216429"/>
-            <a:ext cx="8802410" cy="3046988"/>
+            <a:ext cx="9725739" cy="3046988"/>
           </a:xfrm>
           <a:prstGeom prst="rect">
             <a:avLst/>
@@ -3736,7 +3736,7 @@
             </a:r>
             <a:r>
               <a:rPr kumimoji="1" lang="ja-JP" altLang="en-US" sz="2400" dirty="0"/>
-              <a:t>（ゲームエンジンでの開発の場合は必要）</a:t>
+              <a:t>（ゲームエンジンでの開発の場合は特に必要）</a:t>
             </a:r>
             <a:endParaRPr lang="en-US" altLang="ja-JP" sz="2400" dirty="0"/>
           </a:p>
@@ -3757,11 +3757,7 @@
             </a:r>
             <a:r>
               <a:rPr lang="en-US" altLang="ja-JP" sz="2400" dirty="0"/>
-              <a:t>Git Hub		</a:t>
-            </a:r>
-            <a:r>
-              <a:rPr lang="ja-JP" altLang="en-US" sz="2400" dirty="0"/>
-              <a:t>（個人制作の場合）</a:t>
+              <a:t>Git Hub</a:t>
             </a:r>
             <a:endParaRPr kumimoji="1" lang="en-US" altLang="ja-JP" sz="2400" dirty="0"/>
           </a:p>
@@ -3772,13 +3768,8 @@
             </a:r>
             <a:r>
               <a:rPr lang="en-US" altLang="ja-JP" sz="2400" dirty="0"/>
-              <a:t>Bit Bucket		</a:t>
-            </a:r>
-            <a:r>
-              <a:rPr lang="ja-JP" altLang="en-US" sz="2400" dirty="0"/>
-              <a:t>（チーム制作の場合）</a:t>
-            </a:r>
-            <a:endParaRPr lang="en-US" altLang="ja-JP" sz="2400" dirty="0"/>
+              <a:t>Bit Bucket</a:t>
+            </a:r>
           </a:p>
         </p:txBody>
       </p:sp>
@@ -4607,7 +4598,7 @@
         <p:spPr>
           <a:xfrm>
             <a:off x="567542" y="1216429"/>
-            <a:ext cx="7879080" cy="3416320"/>
+            <a:ext cx="10059164" cy="3416320"/>
           </a:xfrm>
           <a:prstGeom prst="rect">
             <a:avLst/>
@@ -4663,7 +4654,7 @@
           <a:p>
             <a:r>
               <a:rPr lang="ja-JP" altLang="en-US" sz="2400" dirty="0"/>
-              <a:t>まずは</a:t>
+              <a:t>まずは以下のページから</a:t>
             </a:r>
             <a:r>
               <a:rPr lang="en-US" altLang="ja-JP" sz="2400" dirty="0" err="1"/>
